--- a/c5/c5-nivelul-retea-adresare.pptx
+++ b/c5/c5-nivelul-retea-adresare.pptx
@@ -35,6 +35,8 @@
     <p:sldId id="283" r:id="rId29"/>
     <p:sldId id="284" r:id="rId30"/>
     <p:sldId id="285" r:id="rId31"/>
+    <p:sldId id="286" r:id="rId32"/>
+    <p:sldId id="287" r:id="rId33"/>
   </p:sldIdLst>
   <p:sldSz cx="9144000" cy="5143500" type="screen16x9"/>
   <p:notesSz cx="6858000" cy="9144000"/>
@@ -4380,7 +4382,7 @@
             <a:pPr lvl="0"/>
             <a:r>
               <a:rPr/>
-              <a:t>link-local: 169.254.0.0/16</a:t>
+              <a:t>link-local: 169.254.0.0/16 (APIPA - Automatic Private IP Addressing)</a:t>
             </a:r>
           </a:p>
           <a:p>
@@ -4627,48 +4629,483 @@
             </a:pPr>
             <a:r>
               <a:rPr/>
-              <a:t>Tipuri de comunicare IPv6</a:t>
-            </a:r>
-          </a:p>
-        </p:txBody>
-      </p:sp>
-      <p:sp>
-        <p:nvSpPr>
-          <p:cNvPr id="3" name="Content Placeholder 2"/>
-          <p:cNvSpPr>
-            <a:spLocks noGrp="1"/>
-          </p:cNvSpPr>
+              <a:t>Adrese speciale IPv6</a:t>
+            </a:r>
+          </a:p>
+        </p:txBody>
+      </p:sp>
+      <p:graphicFrame>
+        <p:nvGraphicFramePr>
+          <p:cNvPr id="6" name="Content Placeholder 5"/>
+          <p:cNvGraphicFramePr>
+            <a:graphicFrameLocks noGrp="1"/>
+          </p:cNvGraphicFramePr>
           <p:nvPr>
             <p:ph idx="1"/>
           </p:nvPr>
-        </p:nvSpPr>
-        <p:spPr/>
-        <p:txBody>
-          <a:bodyPr/>
-          <a:lstStyle/>
-          <a:p>
-            <a:pPr lvl="0"/>
-            <a:r>
-              <a:rPr/>
-              <a:t>unicast</a:t>
-            </a:r>
-          </a:p>
-          <a:p>
-            <a:pPr lvl="0"/>
-            <a:r>
-              <a:rPr/>
-              <a:t>multicast</a:t>
-            </a:r>
-          </a:p>
-          <a:p>
-            <a:pPr lvl="0"/>
-            <a:r>
-              <a:rPr/>
-              <a:t>anycast (aceeași adresă pe mai multe noduri, ajunge la “cel mai apropiat”)</a:t>
-            </a:r>
-          </a:p>
-        </p:txBody>
-      </p:sp>
+        </p:nvGraphicFramePr>
+        <p:xfrm>
+          <a:off x="457200" y="1193800"/>
+          <a:ext cx="8229600" cy="3390900"/>
+        </p:xfrm>
+        <a:graphic>
+          <a:graphicData uri="http://schemas.openxmlformats.org/drawingml/2006/table">
+            <a:tbl>
+              <a:tblPr firstRow="1" bandRow="1">
+                <a:tableStyleId>{5C22544A-7EE6-4342-B048-85BDC9FD1C3A}</a:tableStyleId>
+              </a:tblPr>
+              <a:tblGrid>
+                <a:gridCol w="2743200"/>
+                <a:gridCol w="2743200"/>
+                <a:gridCol w="2743200"/>
+              </a:tblGrid>
+              <a:tr h="0">
+                <a:tc>
+                  <a:txBody>
+                    <a:bodyPr/>
+                    <a:lstStyle/>
+                    <a:p>
+                      <a:pPr lvl="0" indent="0" marL="0">
+                        <a:buNone/>
+                      </a:pPr>
+                      <a:r>
+                        <a:rPr/>
+                        <a:t>Adresă</a:t>
+                      </a:r>
+                    </a:p>
+                  </a:txBody>
+                  <a:tcPr/>
+                </a:tc>
+                <a:tc>
+                  <a:txBody>
+                    <a:bodyPr/>
+                    <a:lstStyle/>
+                    <a:p>
+                      <a:pPr lvl="0" indent="0" marL="0">
+                        <a:buNone/>
+                      </a:pPr>
+                      <a:r>
+                        <a:rPr/>
+                        <a:t>Prefix</a:t>
+                      </a:r>
+                    </a:p>
+                  </a:txBody>
+                  <a:tcPr/>
+                </a:tc>
+                <a:tc>
+                  <a:txBody>
+                    <a:bodyPr/>
+                    <a:lstStyle/>
+                    <a:p>
+                      <a:pPr lvl="0" indent="0" marL="0">
+                        <a:buNone/>
+                      </a:pPr>
+                      <a:r>
+                        <a:rPr/>
+                        <a:t>Echivalent IPv4</a:t>
+                      </a:r>
+                    </a:p>
+                  </a:txBody>
+                  <a:tcPr/>
+                </a:tc>
+              </a:tr>
+              <a:tr h="0">
+                <a:tc>
+                  <a:txBody>
+                    <a:bodyPr/>
+                    <a:lstStyle/>
+                    <a:p>
+                      <a:pPr lvl="0" indent="0" marL="0">
+                        <a:buNone/>
+                      </a:pPr>
+                      <a:r>
+                        <a:rPr/>
+                        <a:t>Loopback</a:t>
+                      </a:r>
+                    </a:p>
+                  </a:txBody>
+                </a:tc>
+                <a:tc>
+                  <a:txBody>
+                    <a:bodyPr/>
+                    <a:lstStyle/>
+                    <a:p>
+                      <a:pPr lvl="0" indent="0" marL="0">
+                        <a:buNone/>
+                      </a:pPr>
+                      <a:r>
+                        <a:rPr>
+                          <a:latin typeface="Courier"/>
+                        </a:rPr>
+                        <a:t>::1/128</a:t>
+                      </a:r>
+                    </a:p>
+                  </a:txBody>
+                </a:tc>
+                <a:tc>
+                  <a:txBody>
+                    <a:bodyPr/>
+                    <a:lstStyle/>
+                    <a:p>
+                      <a:pPr lvl="0" indent="0" marL="0">
+                        <a:buNone/>
+                      </a:pPr>
+                      <a:r>
+                        <a:rPr>
+                          <a:latin typeface="Courier"/>
+                        </a:rPr>
+                        <a:t>127.0.0.1</a:t>
+                      </a:r>
+                    </a:p>
+                  </a:txBody>
+                </a:tc>
+              </a:tr>
+              <a:tr h="0">
+                <a:tc>
+                  <a:txBody>
+                    <a:bodyPr/>
+                    <a:lstStyle/>
+                    <a:p>
+                      <a:pPr lvl="0" indent="0" marL="0">
+                        <a:buNone/>
+                      </a:pPr>
+                      <a:r>
+                        <a:rPr/>
+                        <a:t>Link-local</a:t>
+                      </a:r>
+                    </a:p>
+                  </a:txBody>
+                </a:tc>
+                <a:tc>
+                  <a:txBody>
+                    <a:bodyPr/>
+                    <a:lstStyle/>
+                    <a:p>
+                      <a:pPr lvl="0" indent="0" marL="0">
+                        <a:buNone/>
+                      </a:pPr>
+                      <a:r>
+                        <a:rPr>
+                          <a:latin typeface="Courier"/>
+                        </a:rPr>
+                        <a:t>fe80::/10</a:t>
+                      </a:r>
+                    </a:p>
+                  </a:txBody>
+                </a:tc>
+                <a:tc>
+                  <a:txBody>
+                    <a:bodyPr/>
+                    <a:lstStyle/>
+                    <a:p>
+                      <a:pPr lvl="0" indent="0" marL="0">
+                        <a:buNone/>
+                      </a:pPr>
+                      <a:r>
+                        <a:rPr>
+                          <a:latin typeface="Courier"/>
+                        </a:rPr>
+                        <a:t>169.254.0.0/16</a:t>
+                      </a:r>
+                      <a:r>
+                        <a:rPr/>
+                        <a:t> (APIPA)</a:t>
+                      </a:r>
+                    </a:p>
+                  </a:txBody>
+                </a:tc>
+              </a:tr>
+              <a:tr h="0">
+                <a:tc>
+                  <a:txBody>
+                    <a:bodyPr/>
+                    <a:lstStyle/>
+                    <a:p>
+                      <a:pPr lvl="0" indent="0" marL="0">
+                        <a:buNone/>
+                      </a:pPr>
+                      <a:r>
+                        <a:rPr/>
+                        <a:t>Unique local</a:t>
+                      </a:r>
+                    </a:p>
+                  </a:txBody>
+                </a:tc>
+                <a:tc>
+                  <a:txBody>
+                    <a:bodyPr/>
+                    <a:lstStyle/>
+                    <a:p>
+                      <a:pPr lvl="0" indent="0" marL="0">
+                        <a:buNone/>
+                      </a:pPr>
+                      <a:r>
+                        <a:rPr>
+                          <a:latin typeface="Courier"/>
+                        </a:rPr>
+                        <a:t>fc00::/7</a:t>
+                      </a:r>
+                      <a:r>
+                        <a:rPr/>
+                        <a:t> (uzual </a:t>
+                      </a:r>
+                      <a:r>
+                        <a:rPr>
+                          <a:latin typeface="Courier"/>
+                        </a:rPr>
+                        <a:t>fd00::/8</a:t>
+                      </a:r>
+                      <a:r>
+                        <a:rPr/>
+                        <a:t>)</a:t>
+                      </a:r>
+                    </a:p>
+                  </a:txBody>
+                </a:tc>
+                <a:tc>
+                  <a:txBody>
+                    <a:bodyPr/>
+                    <a:lstStyle/>
+                    <a:p>
+                      <a:pPr lvl="0" indent="0" marL="0">
+                        <a:buNone/>
+                      </a:pPr>
+                      <a:r>
+                        <a:rPr>
+                          <a:latin typeface="Courier"/>
+                        </a:rPr>
+                        <a:t>10.0.0.0/8</a:t>
+                      </a:r>
+                      <a:r>
+                        <a:rPr/>
+                        <a:t>, </a:t>
+                      </a:r>
+                      <a:r>
+                        <a:rPr>
+                          <a:latin typeface="Courier"/>
+                        </a:rPr>
+                        <a:t>172.16.0.0/12</a:t>
+                      </a:r>
+                      <a:r>
+                        <a:rPr/>
+                        <a:t>, </a:t>
+                      </a:r>
+                      <a:r>
+                        <a:rPr>
+                          <a:latin typeface="Courier"/>
+                        </a:rPr>
+                        <a:t>192.168.0.0/16</a:t>
+                      </a:r>
+                    </a:p>
+                  </a:txBody>
+                </a:tc>
+              </a:tr>
+              <a:tr h="0">
+                <a:tc>
+                  <a:txBody>
+                    <a:bodyPr/>
+                    <a:lstStyle/>
+                    <a:p>
+                      <a:pPr lvl="0" indent="0" marL="0">
+                        <a:buNone/>
+                      </a:pPr>
+                      <a:r>
+                        <a:rPr/>
+                        <a:t>Global unicast</a:t>
+                      </a:r>
+                    </a:p>
+                  </a:txBody>
+                </a:tc>
+                <a:tc>
+                  <a:txBody>
+                    <a:bodyPr/>
+                    <a:lstStyle/>
+                    <a:p>
+                      <a:pPr lvl="0" indent="0" marL="0">
+                        <a:buNone/>
+                      </a:pPr>
+                      <a:r>
+                        <a:rPr>
+                          <a:latin typeface="Courier"/>
+                        </a:rPr>
+                        <a:t>2000::/3</a:t>
+                      </a:r>
+                    </a:p>
+                  </a:txBody>
+                </a:tc>
+                <a:tc>
+                  <a:txBody>
+                    <a:bodyPr/>
+                    <a:lstStyle/>
+                    <a:p>
+                      <a:pPr lvl="0" indent="0" marL="0">
+                        <a:buNone/>
+                      </a:pPr>
+                      <a:r>
+                        <a:rPr/>
+                        <a:t>adrese publice</a:t>
+                      </a:r>
+                    </a:p>
+                  </a:txBody>
+                </a:tc>
+              </a:tr>
+              <a:tr h="0">
+                <a:tc>
+                  <a:txBody>
+                    <a:bodyPr/>
+                    <a:lstStyle/>
+                    <a:p>
+                      <a:pPr lvl="0" indent="0" marL="0">
+                        <a:buNone/>
+                      </a:pPr>
+                      <a:r>
+                        <a:rPr/>
+                        <a:t>Multicast</a:t>
+                      </a:r>
+                    </a:p>
+                  </a:txBody>
+                </a:tc>
+                <a:tc>
+                  <a:txBody>
+                    <a:bodyPr/>
+                    <a:lstStyle/>
+                    <a:p>
+                      <a:pPr lvl="0" indent="0" marL="0">
+                        <a:buNone/>
+                      </a:pPr>
+                      <a:r>
+                        <a:rPr>
+                          <a:latin typeface="Courier"/>
+                        </a:rPr>
+                        <a:t>ff00::/8</a:t>
+                      </a:r>
+                    </a:p>
+                  </a:txBody>
+                </a:tc>
+                <a:tc>
+                  <a:txBody>
+                    <a:bodyPr/>
+                    <a:lstStyle/>
+                    <a:p>
+                      <a:pPr lvl="0" indent="0" marL="0">
+                        <a:buNone/>
+                      </a:pPr>
+                      <a:r>
+                        <a:rPr>
+                          <a:latin typeface="Courier"/>
+                        </a:rPr>
+                        <a:t>224.0.0.0/4</a:t>
+                      </a:r>
+                    </a:p>
+                  </a:txBody>
+                </a:tc>
+              </a:tr>
+              <a:tr h="0">
+                <a:tc>
+                  <a:txBody>
+                    <a:bodyPr/>
+                    <a:lstStyle/>
+                    <a:p>
+                      <a:pPr lvl="0" indent="0" marL="0">
+                        <a:buNone/>
+                      </a:pPr>
+                      <a:r>
+                        <a:rPr/>
+                        <a:t>Unspecified</a:t>
+                      </a:r>
+                    </a:p>
+                  </a:txBody>
+                </a:tc>
+                <a:tc>
+                  <a:txBody>
+                    <a:bodyPr/>
+                    <a:lstStyle/>
+                    <a:p>
+                      <a:pPr lvl="0" indent="0" marL="0">
+                        <a:buNone/>
+                      </a:pPr>
+                      <a:r>
+                        <a:rPr>
+                          <a:latin typeface="Courier"/>
+                        </a:rPr>
+                        <a:t>::/128</a:t>
+                      </a:r>
+                    </a:p>
+                  </a:txBody>
+                </a:tc>
+                <a:tc>
+                  <a:txBody>
+                    <a:bodyPr/>
+                    <a:lstStyle/>
+                    <a:p>
+                      <a:pPr lvl="0" indent="0" marL="0">
+                        <a:buNone/>
+                      </a:pPr>
+                      <a:r>
+                        <a:rPr>
+                          <a:latin typeface="Courier"/>
+                        </a:rPr>
+                        <a:t>0.0.0.0</a:t>
+                      </a:r>
+                    </a:p>
+                  </a:txBody>
+                </a:tc>
+              </a:tr>
+              <a:tr h="0">
+                <a:tc>
+                  <a:txBody>
+                    <a:bodyPr/>
+                    <a:lstStyle/>
+                    <a:p>
+                      <a:pPr lvl="0" indent="0" marL="0">
+                        <a:buNone/>
+                      </a:pPr>
+                      <a:r>
+                        <a:rPr/>
+                        <a:t>Default route</a:t>
+                      </a:r>
+                    </a:p>
+                  </a:txBody>
+                </a:tc>
+                <a:tc>
+                  <a:txBody>
+                    <a:bodyPr/>
+                    <a:lstStyle/>
+                    <a:p>
+                      <a:pPr lvl="0" indent="0" marL="0">
+                        <a:buNone/>
+                      </a:pPr>
+                      <a:r>
+                        <a:rPr>
+                          <a:latin typeface="Courier"/>
+                        </a:rPr>
+                        <a:t>::/0</a:t>
+                      </a:r>
+                    </a:p>
+                  </a:txBody>
+                </a:tc>
+                <a:tc>
+                  <a:txBody>
+                    <a:bodyPr/>
+                    <a:lstStyle/>
+                    <a:p>
+                      <a:pPr lvl="0" indent="0" marL="0">
+                        <a:buNone/>
+                      </a:pPr>
+                      <a:r>
+                        <a:rPr>
+                          <a:latin typeface="Courier"/>
+                        </a:rPr>
+                        <a:t>0.0.0.0/0</a:t>
+                      </a:r>
+                    </a:p>
+                  </a:txBody>
+                </a:tc>
+              </a:tr>
+            </a:tbl>
+          </a:graphicData>
+        </a:graphic>
+      </p:graphicFrame>
     </p:spTree>
   </p:cSld>
 </p:sld>
@@ -4693,12 +5130,12 @@
       </p:grpSpPr>
       <p:sp>
         <p:nvSpPr>
-          <p:cNvPr id="2" name="Title 1"/>
-          <p:cNvSpPr>
-            <a:spLocks noGrp="1"/>
-          </p:cNvSpPr>
-          <p:nvPr>
-            <p:ph type="title"/>
+          <p:cNvPr id="3" name="Content Placeholder 2"/>
+          <p:cNvSpPr>
+            <a:spLocks noGrp="1"/>
+          </p:cNvSpPr>
+          <p:nvPr>
+            <p:ph idx="1"/>
           </p:nvPr>
         </p:nvSpPr>
         <p:spPr/>
@@ -4711,51 +5148,79 @@
             </a:pPr>
             <a:r>
               <a:rPr/>
-              <a:t>IPv6 scopes (ideea)</a:t>
-            </a:r>
-          </a:p>
-        </p:txBody>
-      </p:sp>
-      <p:sp>
-        <p:nvSpPr>
-          <p:cNvPr id="3" name="Content Placeholder 2"/>
-          <p:cNvSpPr>
-            <a:spLocks noGrp="1"/>
-          </p:cNvSpPr>
-          <p:nvPr>
-            <p:ph idx="1"/>
-          </p:nvPr>
-        </p:nvSpPr>
-        <p:spPr/>
-        <p:txBody>
-          <a:bodyPr/>
-          <a:lstStyle/>
-          <a:p>
-            <a:pPr lvl="0"/>
-            <a:r>
-              <a:rPr/>
-              <a:t>link-local: doar pe link</a:t>
-            </a:r>
-          </a:p>
-          <a:p>
-            <a:pPr lvl="0"/>
-            <a:r>
-              <a:rPr/>
-              <a:t>unique local: intern (de obicei)</a:t>
-            </a:r>
-          </a:p>
-          <a:p>
-            <a:pPr lvl="0"/>
-            <a:r>
-              <a:rPr/>
-              <a:t>global: rutabil global</a:t>
-            </a:r>
-          </a:p>
-          <a:p>
-            <a:pPr lvl="0"/>
-            <a:r>
-              <a:rPr/>
-              <a:t>multicast: scope inclus în adresă (conceptual)</a:t>
+              <a:t>Note: - </a:t>
+            </a:r>
+            <a:r>
+              <a:rPr b="1"/>
+              <a:t>Nu există broadcast</a:t>
+            </a:r>
+            <a:r>
+              <a:rPr/>
+              <a:t> în IPv6 — înlocuit complet de multicast - </a:t>
+            </a:r>
+            <a:r>
+              <a:rPr b="1"/>
+              <a:t>Link-local</a:t>
+            </a:r>
+            <a:r>
+              <a:rPr/>
+              <a:t> (</a:t>
+            </a:r>
+            <a:r>
+              <a:rPr>
+                <a:latin typeface="Courier"/>
+              </a:rPr>
+              <a:t>fe80::</a:t>
+            </a:r>
+            <a:r>
+              <a:rPr/>
+              <a:t>) este întotdeauna prezent pe interfață, nu e fallback ca APIPA - </a:t>
+            </a:r>
+            <a:r>
+              <a:rPr b="1"/>
+              <a:t>Unique local</a:t>
+            </a:r>
+            <a:r>
+              <a:rPr/>
+              <a:t> (</a:t>
+            </a:r>
+            <a:r>
+              <a:rPr>
+                <a:latin typeface="Courier"/>
+              </a:rPr>
+              <a:t>fd00::/8</a:t>
+            </a:r>
+            <a:r>
+              <a:rPr/>
+              <a:t>) e analogul adreselor private, dar nu este rutabil pe Internet - Multicast are </a:t>
+            </a:r>
+            <a:r>
+              <a:rPr b="1"/>
+              <a:t>scope inclus în adresă</a:t>
+            </a:r>
+            <a:r>
+              <a:rPr/>
+              <a:t>: </a:t>
+            </a:r>
+            <a:r>
+              <a:rPr>
+                <a:latin typeface="Courier"/>
+              </a:rPr>
+              <a:t>ff02::</a:t>
+            </a:r>
+            <a:r>
+              <a:rPr/>
+              <a:t> = link-local, </a:t>
+            </a:r>
+            <a:r>
+              <a:rPr>
+                <a:latin typeface="Courier"/>
+              </a:rPr>
+              <a:t>ff05::</a:t>
+            </a:r>
+            <a:r>
+              <a:rPr/>
+              <a:t> = site-local etc.</a:t>
             </a:r>
           </a:p>
         </p:txBody>
@@ -4802,7 +5267,7 @@
             </a:pPr>
             <a:r>
               <a:rPr/>
-              <a:t>Subnetting în IPv6 (practic)</a:t>
+              <a:t>Tipuri de comunicare IPv6</a:t>
             </a:r>
           </a:p>
         </p:txBody>
@@ -4825,21 +5290,21 @@
             <a:pPr lvl="0"/>
             <a:r>
               <a:rPr/>
-              <a:t>primești un prefix (ex: /48)</a:t>
-            </a:r>
-          </a:p>
-          <a:p>
-            <a:pPr lvl="0"/>
-            <a:r>
-              <a:rPr/>
-              <a:t>aloci subrețele prin extinderea prefixului (frecvent /64 pentru LAN)</a:t>
-            </a:r>
-          </a:p>
-          <a:p>
-            <a:pPr lvl="0"/>
-            <a:r>
-              <a:rPr/>
-              <a:t>numărul de subrețele din /48 în /64 este 2^(64-48)=65536</a:t>
+              <a:t>unicast</a:t>
+            </a:r>
+          </a:p>
+          <a:p>
+            <a:pPr lvl="0"/>
+            <a:r>
+              <a:rPr/>
+              <a:t>multicast</a:t>
+            </a:r>
+          </a:p>
+          <a:p>
+            <a:pPr lvl="0"/>
+            <a:r>
+              <a:rPr/>
+              <a:t>anycast (aceeași adresă pe mai multe noduri, ajunge la “cel mai apropiat”)</a:t>
             </a:r>
           </a:p>
         </p:txBody>
@@ -4886,7 +5351,7 @@
             </a:pPr>
             <a:r>
               <a:rPr/>
-              <a:t>IPv6 în URL-uri</a:t>
+              <a:t>IPv6 scopes (ideea)</a:t>
             </a:r>
           </a:p>
         </p:txBody>
@@ -4909,14 +5374,28 @@
             <a:pPr lvl="0"/>
             <a:r>
               <a:rPr/>
-              <a:t>[2001:db8::1]</a:t>
-            </a:r>
-          </a:p>
-          <a:p>
-            <a:pPr lvl="0"/>
-            <a:r>
-              <a:rPr/>
-              <a:t>cu port: [2001:db8::1]:8080</a:t>
+              <a:t>link-local: doar pe link</a:t>
+            </a:r>
+          </a:p>
+          <a:p>
+            <a:pPr lvl="0"/>
+            <a:r>
+              <a:rPr/>
+              <a:t>unique local: intern (de obicei)</a:t>
+            </a:r>
+          </a:p>
+          <a:p>
+            <a:pPr lvl="0"/>
+            <a:r>
+              <a:rPr/>
+              <a:t>global: rutabil global</a:t>
+            </a:r>
+          </a:p>
+          <a:p>
+            <a:pPr lvl="0"/>
+            <a:r>
+              <a:rPr/>
+              <a:t>multicast: scope inclus în adresă (conceptual)</a:t>
             </a:r>
           </a:p>
         </p:txBody>
@@ -4963,7 +5442,7 @@
             </a:pPr>
             <a:r>
               <a:rPr/>
-              <a:t>Recapitulare</a:t>
+              <a:t>Subnetting în IPv6 (practic)</a:t>
             </a:r>
           </a:p>
         </p:txBody>
@@ -4986,21 +5465,21 @@
             <a:pPr lvl="0"/>
             <a:r>
               <a:rPr/>
-              <a:t>rol L3: adresare + rutare + TTL/Hop Limit</a:t>
-            </a:r>
-          </a:p>
-          <a:p>
-            <a:pPr lvl="0"/>
-            <a:r>
-              <a:rPr/>
-              <a:t>IPv4: CIDR + subnetting + VLSM</a:t>
-            </a:r>
-          </a:p>
-          <a:p>
-            <a:pPr lvl="0"/>
-            <a:r>
-              <a:rPr/>
-              <a:t>IPv6: tipuri de adrese + prescurtare + prefixe</a:t>
+              <a:t>primești un prefix (ex: /48)</a:t>
+            </a:r>
+          </a:p>
+          <a:p>
+            <a:pPr lvl="0"/>
+            <a:r>
+              <a:rPr/>
+              <a:t>aloci subrețele prin extinderea prefixului (frecvent /64 pentru LAN)</a:t>
+            </a:r>
+          </a:p>
+          <a:p>
+            <a:pPr lvl="0"/>
+            <a:r>
+              <a:rPr/>
+              <a:t>numărul de subrețele din /48 în /64 este 2^(64-48)=65536</a:t>
             </a:r>
           </a:p>
         </p:txBody>
@@ -5083,6 +5562,167 @@
 </file>
 
 <file path=ppt/slides/slide30.xml><?xml version="1.0" encoding="utf-8"?>
+<p:sld xmlns:a="http://schemas.openxmlformats.org/drawingml/2006/main" xmlns:r="http://schemas.openxmlformats.org/officeDocument/2006/relationships" xmlns:p="http://schemas.openxmlformats.org/presentationml/2006/main">
+  <p:cSld>
+    <p:spTree>
+      <p:nvGrpSpPr>
+        <p:cNvPr id="1" name=""/>
+        <p:cNvGrpSpPr/>
+        <p:nvPr/>
+      </p:nvGrpSpPr>
+      <p:grpSpPr>
+        <a:xfrm>
+          <a:off x="0" y="0"/>
+          <a:ext cx="0" cy="0"/>
+          <a:chOff x="0" y="0"/>
+          <a:chExt cx="0" cy="0"/>
+        </a:xfrm>
+      </p:grpSpPr>
+      <p:sp>
+        <p:nvSpPr>
+          <p:cNvPr id="2" name="Title 1"/>
+          <p:cNvSpPr>
+            <a:spLocks noGrp="1"/>
+          </p:cNvSpPr>
+          <p:nvPr>
+            <p:ph type="title"/>
+          </p:nvPr>
+        </p:nvSpPr>
+        <p:spPr/>
+        <p:txBody>
+          <a:bodyPr/>
+          <a:lstStyle/>
+          <a:p>
+            <a:pPr lvl="0" indent="0" marL="0">
+              <a:buNone/>
+            </a:pPr>
+            <a:r>
+              <a:rPr/>
+              <a:t>IPv6 în URL-uri</a:t>
+            </a:r>
+          </a:p>
+        </p:txBody>
+      </p:sp>
+      <p:sp>
+        <p:nvSpPr>
+          <p:cNvPr id="3" name="Content Placeholder 2"/>
+          <p:cNvSpPr>
+            <a:spLocks noGrp="1"/>
+          </p:cNvSpPr>
+          <p:nvPr>
+            <p:ph idx="1"/>
+          </p:nvPr>
+        </p:nvSpPr>
+        <p:spPr/>
+        <p:txBody>
+          <a:bodyPr/>
+          <a:lstStyle/>
+          <a:p>
+            <a:pPr lvl="0"/>
+            <a:r>
+              <a:rPr/>
+              <a:t>[2001:db8::1]</a:t>
+            </a:r>
+          </a:p>
+          <a:p>
+            <a:pPr lvl="0"/>
+            <a:r>
+              <a:rPr/>
+              <a:t>cu port: [2001:db8::1]:8080</a:t>
+            </a:r>
+          </a:p>
+        </p:txBody>
+      </p:sp>
+    </p:spTree>
+  </p:cSld>
+</p:sld>
+</file>
+
+<file path=ppt/slides/slide31.xml><?xml version="1.0" encoding="utf-8"?>
+<p:sld xmlns:a="http://schemas.openxmlformats.org/drawingml/2006/main" xmlns:r="http://schemas.openxmlformats.org/officeDocument/2006/relationships" xmlns:p="http://schemas.openxmlformats.org/presentationml/2006/main">
+  <p:cSld>
+    <p:spTree>
+      <p:nvGrpSpPr>
+        <p:cNvPr id="1" name=""/>
+        <p:cNvGrpSpPr/>
+        <p:nvPr/>
+      </p:nvGrpSpPr>
+      <p:grpSpPr>
+        <a:xfrm>
+          <a:off x="0" y="0"/>
+          <a:ext cx="0" cy="0"/>
+          <a:chOff x="0" y="0"/>
+          <a:chExt cx="0" cy="0"/>
+        </a:xfrm>
+      </p:grpSpPr>
+      <p:sp>
+        <p:nvSpPr>
+          <p:cNvPr id="2" name="Title 1"/>
+          <p:cNvSpPr>
+            <a:spLocks noGrp="1"/>
+          </p:cNvSpPr>
+          <p:nvPr>
+            <p:ph type="title"/>
+          </p:nvPr>
+        </p:nvSpPr>
+        <p:spPr/>
+        <p:txBody>
+          <a:bodyPr/>
+          <a:lstStyle/>
+          <a:p>
+            <a:pPr lvl="0" indent="0" marL="0">
+              <a:buNone/>
+            </a:pPr>
+            <a:r>
+              <a:rPr/>
+              <a:t>Recapitulare</a:t>
+            </a:r>
+          </a:p>
+        </p:txBody>
+      </p:sp>
+      <p:sp>
+        <p:nvSpPr>
+          <p:cNvPr id="3" name="Content Placeholder 2"/>
+          <p:cNvSpPr>
+            <a:spLocks noGrp="1"/>
+          </p:cNvSpPr>
+          <p:nvPr>
+            <p:ph idx="1"/>
+          </p:nvPr>
+        </p:nvSpPr>
+        <p:spPr/>
+        <p:txBody>
+          <a:bodyPr/>
+          <a:lstStyle/>
+          <a:p>
+            <a:pPr lvl="0"/>
+            <a:r>
+              <a:rPr/>
+              <a:t>rol L3: adresare + rutare + TTL/Hop Limit</a:t>
+            </a:r>
+          </a:p>
+          <a:p>
+            <a:pPr lvl="0"/>
+            <a:r>
+              <a:rPr/>
+              <a:t>IPv4: CIDR + subnetting + VLSM</a:t>
+            </a:r>
+          </a:p>
+          <a:p>
+            <a:pPr lvl="0"/>
+            <a:r>
+              <a:rPr/>
+              <a:t>IPv6: tipuri de adrese + prescurtare + prefixe</a:t>
+            </a:r>
+          </a:p>
+        </p:txBody>
+      </p:sp>
+    </p:spTree>
+  </p:cSld>
+</p:sld>
+</file>
+
+<file path=ppt/slides/slide32.xml><?xml version="1.0" encoding="utf-8"?>
 <p:sld xmlns:a="http://schemas.openxmlformats.org/drawingml/2006/main" xmlns:r="http://schemas.openxmlformats.org/officeDocument/2006/relationships" xmlns:p="http://schemas.openxmlformats.org/presentationml/2006/main">
   <p:cSld>
     <p:spTree>
